--- a/AgenticAI/5-Tools-and-Framework/Langchain/Langchain-1-why-do-we-need-it.pptx
+++ b/AgenticAI/5-Tools-and-Framework/Langchain/Langchain-1-why-do-we-need-it.pptx
@@ -5,17 +5,18 @@
     <p:sldMasterId id="2147483648" r:id="rId1"/>
   </p:sldMasterIdLst>
   <p:notesMasterIdLst>
-    <p:notesMasterId r:id="rId7"/>
+    <p:notesMasterId r:id="rId8"/>
   </p:notesMasterIdLst>
   <p:handoutMasterIdLst>
-    <p:handoutMasterId r:id="rId8"/>
+    <p:handoutMasterId r:id="rId9"/>
   </p:handoutMasterIdLst>
   <p:sldIdLst>
     <p:sldId id="257" r:id="rId2"/>
     <p:sldId id="276" r:id="rId3"/>
-    <p:sldId id="277" r:id="rId4"/>
-    <p:sldId id="275" r:id="rId5"/>
-    <p:sldId id="278" r:id="rId6"/>
+    <p:sldId id="279" r:id="rId4"/>
+    <p:sldId id="277" r:id="rId5"/>
+    <p:sldId id="275" r:id="rId6"/>
+    <p:sldId id="278" r:id="rId7"/>
   </p:sldIdLst>
   <p:sldSz cx="12192000" cy="6858000"/>
   <p:notesSz cx="6858000" cy="9144000"/>
@@ -219,7 +220,7 @@
           <a:p>
             <a:fld id="{7BAEECA8-D063-486F-AE31-5020270C1449}" type="datetimeFigureOut">
               <a:rPr lang="en-US" smtClean="0"/>
-              <a:t>6/1/2026</a:t>
+              <a:t>6/17/2026</a:t>
             </a:fld>
             <a:endParaRPr lang="en-US"/>
           </a:p>
@@ -396,7 +397,7 @@
           <a:p>
             <a:fld id="{CB233BD1-3BA8-448D-9D08-7846095EA517}" type="datetimeFigureOut">
               <a:rPr lang="en-US" smtClean="0"/>
-              <a:t>6/1/2026</a:t>
+              <a:t>6/17/2026</a:t>
             </a:fld>
             <a:endParaRPr lang="en-US"/>
           </a:p>
@@ -810,7 +811,7 @@
           <a:p>
             <a:fld id="{6383FAE1-13DE-4511-8C1B-C8AFB720664C}" type="datetimeFigureOut">
               <a:rPr lang="en-US" smtClean="0"/>
-              <a:t>6/1/2026</a:t>
+              <a:t>6/17/2026</a:t>
             </a:fld>
             <a:endParaRPr lang="en-US"/>
           </a:p>
@@ -1008,7 +1009,7 @@
           <a:p>
             <a:fld id="{6383FAE1-13DE-4511-8C1B-C8AFB720664C}" type="datetimeFigureOut">
               <a:rPr lang="en-US" smtClean="0"/>
-              <a:t>6/1/2026</a:t>
+              <a:t>6/17/2026</a:t>
             </a:fld>
             <a:endParaRPr lang="en-US"/>
           </a:p>
@@ -1216,7 +1217,7 @@
           <a:p>
             <a:fld id="{6383FAE1-13DE-4511-8C1B-C8AFB720664C}" type="datetimeFigureOut">
               <a:rPr lang="en-US" smtClean="0"/>
-              <a:t>6/1/2026</a:t>
+              <a:t>6/17/2026</a:t>
             </a:fld>
             <a:endParaRPr lang="en-US"/>
           </a:p>
@@ -1414,7 +1415,7 @@
           <a:p>
             <a:fld id="{6383FAE1-13DE-4511-8C1B-C8AFB720664C}" type="datetimeFigureOut">
               <a:rPr lang="en-US" smtClean="0"/>
-              <a:t>6/1/2026</a:t>
+              <a:t>6/17/2026</a:t>
             </a:fld>
             <a:endParaRPr lang="en-US"/>
           </a:p>
@@ -1689,7 +1690,7 @@
           <a:p>
             <a:fld id="{6383FAE1-13DE-4511-8C1B-C8AFB720664C}" type="datetimeFigureOut">
               <a:rPr lang="en-US" smtClean="0"/>
-              <a:t>6/1/2026</a:t>
+              <a:t>6/17/2026</a:t>
             </a:fld>
             <a:endParaRPr lang="en-US"/>
           </a:p>
@@ -1954,7 +1955,7 @@
           <a:p>
             <a:fld id="{6383FAE1-13DE-4511-8C1B-C8AFB720664C}" type="datetimeFigureOut">
               <a:rPr lang="en-US" smtClean="0"/>
-              <a:t>6/1/2026</a:t>
+              <a:t>6/17/2026</a:t>
             </a:fld>
             <a:endParaRPr lang="en-US"/>
           </a:p>
@@ -2366,7 +2367,7 @@
           <a:p>
             <a:fld id="{6383FAE1-13DE-4511-8C1B-C8AFB720664C}" type="datetimeFigureOut">
               <a:rPr lang="en-US" smtClean="0"/>
-              <a:t>6/1/2026</a:t>
+              <a:t>6/17/2026</a:t>
             </a:fld>
             <a:endParaRPr lang="en-US"/>
           </a:p>
@@ -2507,7 +2508,7 @@
           <a:p>
             <a:fld id="{6383FAE1-13DE-4511-8C1B-C8AFB720664C}" type="datetimeFigureOut">
               <a:rPr lang="en-US" smtClean="0"/>
-              <a:t>6/1/2026</a:t>
+              <a:t>6/17/2026</a:t>
             </a:fld>
             <a:endParaRPr lang="en-US"/>
           </a:p>
@@ -2620,7 +2621,7 @@
           <a:p>
             <a:fld id="{6383FAE1-13DE-4511-8C1B-C8AFB720664C}" type="datetimeFigureOut">
               <a:rPr lang="en-US" smtClean="0"/>
-              <a:t>6/1/2026</a:t>
+              <a:t>6/17/2026</a:t>
             </a:fld>
             <a:endParaRPr lang="en-US"/>
           </a:p>
@@ -2931,7 +2932,7 @@
           <a:p>
             <a:fld id="{6383FAE1-13DE-4511-8C1B-C8AFB720664C}" type="datetimeFigureOut">
               <a:rPr lang="en-US" smtClean="0"/>
-              <a:t>6/1/2026</a:t>
+              <a:t>6/17/2026</a:t>
             </a:fld>
             <a:endParaRPr lang="en-US"/>
           </a:p>
@@ -3222,7 +3223,7 @@
           <a:p>
             <a:fld id="{6383FAE1-13DE-4511-8C1B-C8AFB720664C}" type="datetimeFigureOut">
               <a:rPr lang="en-US" smtClean="0"/>
-              <a:t>6/1/2026</a:t>
+              <a:t>6/17/2026</a:t>
             </a:fld>
             <a:endParaRPr lang="en-US"/>
           </a:p>
@@ -3466,7 +3467,7 @@
           <a:p>
             <a:fld id="{6383FAE1-13DE-4511-8C1B-C8AFB720664C}" type="datetimeFigureOut">
               <a:rPr lang="en-US" smtClean="0"/>
-              <a:t>6/1/2026</a:t>
+              <a:t>6/17/2026</a:t>
             </a:fld>
             <a:endParaRPr lang="en-US"/>
           </a:p>
@@ -4189,7 +4190,7 @@
         </p:blipFill>
         <p:spPr>
           <a:xfrm>
-            <a:off x="210994" y="760786"/>
+            <a:off x="238426" y="560463"/>
             <a:ext cx="5949580" cy="3398248"/>
           </a:xfrm>
           <a:prstGeom prst="rect">
@@ -4219,7 +4220,7 @@
         </p:blipFill>
         <p:spPr>
           <a:xfrm>
-            <a:off x="6405094" y="2203704"/>
+            <a:off x="6514822" y="2259587"/>
             <a:ext cx="5575912" cy="3910660"/>
           </a:xfrm>
           <a:prstGeom prst="rect">
@@ -4241,6 +4242,114 @@
 </file>
 
 <file path=ppt/slides/slide3.xml><?xml version="1.0" encoding="utf-8"?>
+<p:sld xmlns:a="http://schemas.openxmlformats.org/drawingml/2006/main" xmlns:r="http://schemas.openxmlformats.org/officeDocument/2006/relationships" xmlns:p="http://schemas.openxmlformats.org/presentationml/2006/main">
+  <p:cSld>
+    <p:spTree>
+      <p:nvGrpSpPr>
+        <p:cNvPr id="1" name="">
+          <a:extLst>
+            <a:ext uri="{FF2B5EF4-FFF2-40B4-BE49-F238E27FC236}">
+              <a16:creationId xmlns:a16="http://schemas.microsoft.com/office/drawing/2014/main" id="{D9E8A099-1D93-51DE-FF0B-5D63DE8FE40B}"/>
+            </a:ext>
+          </a:extLst>
+        </p:cNvPr>
+        <p:cNvGrpSpPr/>
+        <p:nvPr/>
+      </p:nvGrpSpPr>
+      <p:grpSpPr>
+        <a:xfrm>
+          <a:off x="0" y="0"/>
+          <a:ext cx="0" cy="0"/>
+          <a:chOff x="0" y="0"/>
+          <a:chExt cx="0" cy="0"/>
+        </a:xfrm>
+      </p:grpSpPr>
+      <p:sp>
+        <p:nvSpPr>
+          <p:cNvPr id="3" name="TextBox 2">
+            <a:extLst>
+              <a:ext uri="{FF2B5EF4-FFF2-40B4-BE49-F238E27FC236}">
+                <a16:creationId xmlns:a16="http://schemas.microsoft.com/office/drawing/2014/main" id="{FE43729E-ECAE-5267-3D6F-0246DD3736D2}"/>
+              </a:ext>
+            </a:extLst>
+          </p:cNvPr>
+          <p:cNvSpPr txBox="1"/>
+          <p:nvPr/>
+        </p:nvSpPr>
+        <p:spPr>
+          <a:xfrm>
+            <a:off x="434340" y="98798"/>
+            <a:ext cx="6190488" cy="461665"/>
+          </a:xfrm>
+          <a:prstGeom prst="rect">
+            <a:avLst/>
+          </a:prstGeom>
+          <a:noFill/>
+        </p:spPr>
+        <p:txBody>
+          <a:bodyPr wrap="square">
+            <a:spAutoFit/>
+          </a:bodyPr>
+          <a:lstStyle/>
+          <a:p>
+            <a:r>
+              <a:rPr lang="en-US" sz="2400" dirty="0">
+                <a:solidFill>
+                  <a:schemeClr val="accent6">
+                    <a:lumMod val="60000"/>
+                    <a:lumOff val="40000"/>
+                  </a:schemeClr>
+                </a:solidFill>
+              </a:rPr>
+              <a:t>Problem: No Uniformity Across LLM Providers</a:t>
+            </a:r>
+          </a:p>
+        </p:txBody>
+      </p:sp>
+      <p:pic>
+        <p:nvPicPr>
+          <p:cNvPr id="6" name="Picture 5">
+            <a:extLst>
+              <a:ext uri="{FF2B5EF4-FFF2-40B4-BE49-F238E27FC236}">
+                <a16:creationId xmlns:a16="http://schemas.microsoft.com/office/drawing/2014/main" id="{C90A2C69-1A0F-545A-0207-89C34E554770}"/>
+              </a:ext>
+            </a:extLst>
+          </p:cNvPr>
+          <p:cNvPicPr>
+            <a:picLocks noChangeAspect="1"/>
+          </p:cNvPicPr>
+          <p:nvPr/>
+        </p:nvPicPr>
+        <p:blipFill>
+          <a:blip r:embed="rId2"/>
+          <a:stretch>
+            <a:fillRect/>
+          </a:stretch>
+        </p:blipFill>
+        <p:spPr>
+          <a:xfrm>
+            <a:off x="1577057" y="1380744"/>
+            <a:ext cx="6670985" cy="3123409"/>
+          </a:xfrm>
+          <a:prstGeom prst="rect">
+            <a:avLst/>
+          </a:prstGeom>
+        </p:spPr>
+      </p:pic>
+    </p:spTree>
+    <p:extLst>
+      <p:ext uri="{BB962C8B-B14F-4D97-AF65-F5344CB8AC3E}">
+        <p14:creationId xmlns:p14="http://schemas.microsoft.com/office/powerpoint/2010/main" val="3947818761"/>
+      </p:ext>
+    </p:extLst>
+  </p:cSld>
+  <p:clrMapOvr>
+    <a:masterClrMapping/>
+  </p:clrMapOvr>
+</p:sld>
+</file>
+
+<file path=ppt/slides/slide4.xml><?xml version="1.0" encoding="utf-8"?>
 <p:sld xmlns:a="http://schemas.openxmlformats.org/drawingml/2006/main" xmlns:r="http://schemas.openxmlformats.org/officeDocument/2006/relationships" xmlns:p="http://schemas.openxmlformats.org/presentationml/2006/main">
   <p:cSld>
     <p:spTree>
@@ -4438,7 +4547,7 @@
 </p:sld>
 </file>
 
-<file path=ppt/slides/slide4.xml><?xml version="1.0" encoding="utf-8"?>
+<file path=ppt/slides/slide5.xml><?xml version="1.0" encoding="utf-8"?>
 <p:sld xmlns:a="http://schemas.openxmlformats.org/drawingml/2006/main" xmlns:r="http://schemas.openxmlformats.org/officeDocument/2006/relationships" xmlns:p="http://schemas.openxmlformats.org/presentationml/2006/main">
   <p:cSld>
     <p:spTree>
@@ -5044,6 +5153,48 @@
           </a:p>
         </p:txBody>
       </p:sp>
+      <p:sp>
+        <p:nvSpPr>
+          <p:cNvPr id="2" name="TextBox 1">
+            <a:extLst>
+              <a:ext uri="{FF2B5EF4-FFF2-40B4-BE49-F238E27FC236}">
+                <a16:creationId xmlns:a16="http://schemas.microsoft.com/office/drawing/2014/main" id="{441FC16D-3AFB-54EB-F888-2C0F29D9BD35}"/>
+              </a:ext>
+            </a:extLst>
+          </p:cNvPr>
+          <p:cNvSpPr txBox="1"/>
+          <p:nvPr/>
+        </p:nvSpPr>
+        <p:spPr>
+          <a:xfrm>
+            <a:off x="8083296" y="2194560"/>
+            <a:ext cx="1673022" cy="369332"/>
+          </a:xfrm>
+          <a:prstGeom prst="rect">
+            <a:avLst/>
+          </a:prstGeom>
+          <a:noFill/>
+        </p:spPr>
+        <p:txBody>
+          <a:bodyPr wrap="none" rtlCol="0">
+            <a:spAutoFit/>
+          </a:bodyPr>
+          <a:lstStyle/>
+          <a:p>
+            <a:r>
+              <a:rPr lang="en-US" dirty="0">
+                <a:solidFill>
+                  <a:schemeClr val="accent6">
+                    <a:lumMod val="60000"/>
+                    <a:lumOff val="40000"/>
+                  </a:schemeClr>
+                </a:solidFill>
+              </a:rPr>
+              <a:t>Communication</a:t>
+            </a:r>
+          </a:p>
+        </p:txBody>
+      </p:sp>
     </p:spTree>
     <p:extLst>
       <p:ext uri="{BB962C8B-B14F-4D97-AF65-F5344CB8AC3E}">
@@ -5057,7 +5208,7 @@
 </p:sld>
 </file>
 
-<file path=ppt/slides/slide5.xml><?xml version="1.0" encoding="utf-8"?>
+<file path=ppt/slides/slide6.xml><?xml version="1.0" encoding="utf-8"?>
 <p:sld xmlns:a="http://schemas.openxmlformats.org/drawingml/2006/main" xmlns:r="http://schemas.openxmlformats.org/officeDocument/2006/relationships" xmlns:p="http://schemas.openxmlformats.org/presentationml/2006/main">
   <p:cSld>
     <p:spTree>

--- a/AgenticAI/5-Tools-and-Framework/Langchain/Langchain-1-why-do-we-need-it.pptx
+++ b/AgenticAI/5-Tools-and-Framework/Langchain/Langchain-1-why-do-we-need-it.pptx
@@ -220,7 +220,7 @@
           <a:p>
             <a:fld id="{7BAEECA8-D063-486F-AE31-5020270C1449}" type="datetimeFigureOut">
               <a:rPr lang="en-US" smtClean="0"/>
-              <a:t>6/17/2026</a:t>
+              <a:t>6/22/2026</a:t>
             </a:fld>
             <a:endParaRPr lang="en-US"/>
           </a:p>
@@ -397,7 +397,7 @@
           <a:p>
             <a:fld id="{CB233BD1-3BA8-448D-9D08-7846095EA517}" type="datetimeFigureOut">
               <a:rPr lang="en-US" smtClean="0"/>
-              <a:t>6/17/2026</a:t>
+              <a:t>6/22/2026</a:t>
             </a:fld>
             <a:endParaRPr lang="en-US"/>
           </a:p>
@@ -811,7 +811,7 @@
           <a:p>
             <a:fld id="{6383FAE1-13DE-4511-8C1B-C8AFB720664C}" type="datetimeFigureOut">
               <a:rPr lang="en-US" smtClean="0"/>
-              <a:t>6/17/2026</a:t>
+              <a:t>6/22/2026</a:t>
             </a:fld>
             <a:endParaRPr lang="en-US"/>
           </a:p>
@@ -1009,7 +1009,7 @@
           <a:p>
             <a:fld id="{6383FAE1-13DE-4511-8C1B-C8AFB720664C}" type="datetimeFigureOut">
               <a:rPr lang="en-US" smtClean="0"/>
-              <a:t>6/17/2026</a:t>
+              <a:t>6/22/2026</a:t>
             </a:fld>
             <a:endParaRPr lang="en-US"/>
           </a:p>
@@ -1217,7 +1217,7 @@
           <a:p>
             <a:fld id="{6383FAE1-13DE-4511-8C1B-C8AFB720664C}" type="datetimeFigureOut">
               <a:rPr lang="en-US" smtClean="0"/>
-              <a:t>6/17/2026</a:t>
+              <a:t>6/22/2026</a:t>
             </a:fld>
             <a:endParaRPr lang="en-US"/>
           </a:p>
@@ -1415,7 +1415,7 @@
           <a:p>
             <a:fld id="{6383FAE1-13DE-4511-8C1B-C8AFB720664C}" type="datetimeFigureOut">
               <a:rPr lang="en-US" smtClean="0"/>
-              <a:t>6/17/2026</a:t>
+              <a:t>6/22/2026</a:t>
             </a:fld>
             <a:endParaRPr lang="en-US"/>
           </a:p>
@@ -1690,7 +1690,7 @@
           <a:p>
             <a:fld id="{6383FAE1-13DE-4511-8C1B-C8AFB720664C}" type="datetimeFigureOut">
               <a:rPr lang="en-US" smtClean="0"/>
-              <a:t>6/17/2026</a:t>
+              <a:t>6/22/2026</a:t>
             </a:fld>
             <a:endParaRPr lang="en-US"/>
           </a:p>
@@ -1955,7 +1955,7 @@
           <a:p>
             <a:fld id="{6383FAE1-13DE-4511-8C1B-C8AFB720664C}" type="datetimeFigureOut">
               <a:rPr lang="en-US" smtClean="0"/>
-              <a:t>6/17/2026</a:t>
+              <a:t>6/22/2026</a:t>
             </a:fld>
             <a:endParaRPr lang="en-US"/>
           </a:p>
@@ -2367,7 +2367,7 @@
           <a:p>
             <a:fld id="{6383FAE1-13DE-4511-8C1B-C8AFB720664C}" type="datetimeFigureOut">
               <a:rPr lang="en-US" smtClean="0"/>
-              <a:t>6/17/2026</a:t>
+              <a:t>6/22/2026</a:t>
             </a:fld>
             <a:endParaRPr lang="en-US"/>
           </a:p>
@@ -2508,7 +2508,7 @@
           <a:p>
             <a:fld id="{6383FAE1-13DE-4511-8C1B-C8AFB720664C}" type="datetimeFigureOut">
               <a:rPr lang="en-US" smtClean="0"/>
-              <a:t>6/17/2026</a:t>
+              <a:t>6/22/2026</a:t>
             </a:fld>
             <a:endParaRPr lang="en-US"/>
           </a:p>
@@ -2621,7 +2621,7 @@
           <a:p>
             <a:fld id="{6383FAE1-13DE-4511-8C1B-C8AFB720664C}" type="datetimeFigureOut">
               <a:rPr lang="en-US" smtClean="0"/>
-              <a:t>6/17/2026</a:t>
+              <a:t>6/22/2026</a:t>
             </a:fld>
             <a:endParaRPr lang="en-US"/>
           </a:p>
@@ -2932,7 +2932,7 @@
           <a:p>
             <a:fld id="{6383FAE1-13DE-4511-8C1B-C8AFB720664C}" type="datetimeFigureOut">
               <a:rPr lang="en-US" smtClean="0"/>
-              <a:t>6/17/2026</a:t>
+              <a:t>6/22/2026</a:t>
             </a:fld>
             <a:endParaRPr lang="en-US"/>
           </a:p>
@@ -3223,7 +3223,7 @@
           <a:p>
             <a:fld id="{6383FAE1-13DE-4511-8C1B-C8AFB720664C}" type="datetimeFigureOut">
               <a:rPr lang="en-US" smtClean="0"/>
-              <a:t>6/17/2026</a:t>
+              <a:t>6/22/2026</a:t>
             </a:fld>
             <a:endParaRPr lang="en-US"/>
           </a:p>
@@ -3467,7 +3467,7 @@
           <a:p>
             <a:fld id="{6383FAE1-13DE-4511-8C1B-C8AFB720664C}" type="datetimeFigureOut">
               <a:rPr lang="en-US" smtClean="0"/>
-              <a:t>6/17/2026</a:t>
+              <a:t>6/22/2026</a:t>
             </a:fld>
             <a:endParaRPr lang="en-US"/>
           </a:p>
@@ -4069,7 +4069,7 @@
               <a:t>The need for </a:t>
             </a:r>
             <a:r>
-              <a:rPr lang="en-US" sz="2800" dirty="0" err="1">
+              <a:rPr lang="en-US" sz="2800">
                 <a:solidFill>
                   <a:schemeClr val="accent6">
                     <a:lumMod val="60000"/>
@@ -4077,7 +4077,7 @@
                   </a:schemeClr>
                 </a:solidFill>
               </a:rPr>
-              <a:t>langchain</a:t>
+              <a:t>LangChain</a:t>
             </a:r>
             <a:endParaRPr lang="en-US" sz="2800" dirty="0">
               <a:solidFill>

--- a/AgenticAI/5-Tools-and-Framework/Langchain/Langchain-1-why-do-we-need-it.pptx
+++ b/AgenticAI/5-Tools-and-Framework/Langchain/Langchain-1-why-do-we-need-it.pptx
@@ -220,7 +220,7 @@
           <a:p>
             <a:fld id="{7BAEECA8-D063-486F-AE31-5020270C1449}" type="datetimeFigureOut">
               <a:rPr lang="en-US" smtClean="0"/>
-              <a:t>6/22/2026</a:t>
+              <a:t>6/24/2026</a:t>
             </a:fld>
             <a:endParaRPr lang="en-US"/>
           </a:p>
@@ -313,6 +313,326 @@
   </p:cSld>
   <p:clrMap bg1="lt1" tx1="dk1" bg2="lt2" tx2="dk2" accent1="accent1" accent2="accent2" accent3="accent3" accent4="accent4" accent5="accent5" accent6="accent6" hlink="hlink" folHlink="folHlink"/>
 </p:handoutMaster>
+</file>
+
+<file path=ppt/ink/ink1.xml><?xml version="1.0" encoding="utf-8"?>
+<inkml:ink xmlns:inkml="http://www.w3.org/2003/InkML">
+  <inkml:definitions>
+    <inkml:context xml:id="ctx0">
+      <inkml:inkSource xml:id="inkSrc0">
+        <inkml:traceFormat>
+          <inkml:channel name="X" type="integer" min="-2.14748E9" max="2.14748E9" units="cm"/>
+          <inkml:channel name="Y" type="integer" min="-2.14748E9" max="2.14748E9" units="cm"/>
+          <inkml:channel name="F" type="integer" max="32767" units="dev"/>
+          <inkml:channel name="OA" type="integer" max="360" units="deg"/>
+          <inkml:channel name="OE" type="integer" max="90" units="deg"/>
+        </inkml:traceFormat>
+        <inkml:channelProperties>
+          <inkml:channelProperty channel="X" name="resolution" value="1000" units="1/cm"/>
+          <inkml:channelProperty channel="Y" name="resolution" value="1000" units="1/cm"/>
+          <inkml:channelProperty channel="F" name="resolution" value="0" units="1/dev"/>
+          <inkml:channelProperty channel="OA" name="resolution" value="1000" units="1/deg"/>
+          <inkml:channelProperty channel="OE" name="resolution" value="1000" units="1/deg"/>
+        </inkml:channelProperties>
+      </inkml:inkSource>
+      <inkml:timestamp xml:id="ts0" timeString="2026-06-24T05:32:05.270"/>
+    </inkml:context>
+    <inkml:brush xml:id="br0">
+      <inkml:brushProperty name="width" value="0.1" units="cm"/>
+      <inkml:brushProperty name="height" value="0.1" units="cm"/>
+      <inkml:brushProperty name="color" value="#FFC114"/>
+    </inkml:brush>
+  </inkml:definitions>
+  <inkml:trace contextRef="#ctx0" brushRef="#br0">0 435 5256 0 0,'6'-37'911'0'0,"-6"35"-676"0"0,3-31 2219 0 0,70 122-2847 0 0,15 14 311 0 0,-66-76 63 0 0,-22-25 26 0 0,13 9-2 0 0,-12-10 176 0 0,16-24-91 0 0,21-33-71 0 0,2 1 1 0 0,3 3-1 0 0,2 1 1 0 0,2 2 0 0 0,3 3-1 0 0,1 1 1 0 0,2 3-1 0 0,108-65 1 0 0,-146 100-29 0 0,-9 4 1 0 0,-1 1 1 0 0,1-2-1 0 0,-1 1 0 0 0,0 0 0 0 0,0-1 0 0 0,0 0 0 0 0,6-7 0 0 0,30-16 38 0 0,-40 26-20 0 0</inkml:trace>
+</inkml:ink>
+</file>
+
+<file path=ppt/ink/ink10.xml><?xml version="1.0" encoding="utf-8"?>
+<inkml:ink xmlns:inkml="http://www.w3.org/2003/InkML">
+  <inkml:definitions>
+    <inkml:context xml:id="ctx0">
+      <inkml:inkSource xml:id="inkSrc0">
+        <inkml:traceFormat>
+          <inkml:channel name="X" type="integer" min="-2.14748E9" max="2.14748E9" units="cm"/>
+          <inkml:channel name="Y" type="integer" min="-2.14748E9" max="2.14748E9" units="cm"/>
+          <inkml:channel name="F" type="integer" max="32767" units="dev"/>
+          <inkml:channel name="OA" type="integer" max="360" units="deg"/>
+          <inkml:channel name="OE" type="integer" max="90" units="deg"/>
+        </inkml:traceFormat>
+        <inkml:channelProperties>
+          <inkml:channelProperty channel="X" name="resolution" value="1000" units="1/cm"/>
+          <inkml:channelProperty channel="Y" name="resolution" value="1000" units="1/cm"/>
+          <inkml:channelProperty channel="F" name="resolution" value="0" units="1/dev"/>
+          <inkml:channelProperty channel="OA" name="resolution" value="1000" units="1/deg"/>
+          <inkml:channelProperty channel="OE" name="resolution" value="1000" units="1/deg"/>
+        </inkml:channelProperties>
+      </inkml:inkSource>
+      <inkml:timestamp xml:id="ts0" timeString="2026-06-24T05:32:46.326"/>
+    </inkml:context>
+    <inkml:brush xml:id="br0">
+      <inkml:brushProperty name="width" value="0.1" units="cm"/>
+      <inkml:brushProperty name="height" value="0.1" units="cm"/>
+      <inkml:brushProperty name="color" value="#FFC114"/>
+    </inkml:brush>
+  </inkml:definitions>
+  <inkml:trace contextRef="#ctx0" brushRef="#br0">12 131 6257 0 0,'-2'-3'39'0'0,"0"-1"0"0"0,1 1 0 0 0,-1-1 0 0 0,1 1 0 0 0,0-1 1 0 0,0 0-1 0 0,0 0 0 0 0,1 0 0 0 0,-1 0 0 0 0,1-4 0 0 0,3-2 638 0 0,5 30-677 0 0,-2-1 3 0 0,0 0 0 0 0,2-1 1 0 0,0 0-1 0 0,2 0 0 0 0,-1 0 0 0 0,2-1 0 0 0,1-1 1 0 0,0 0-1 0 0,21 22 0 0 0,-31-36 36 0 0,-1-1 0 0 0,0 0 0 0 0,0-1 0 0 0,1 1-1 0 0,-1 0 1 0 0,0 0 0 0 0,1 0 0 0 0,-1-1 0 0 0,1 1 0 0 0,-1-1 0 0 0,1 1 0 0 0,-1-1-1 0 0,1 0 1 0 0,0 0 0 0 0,-1 1 0 0 0,1-1 0 0 0,-1 0 0 0 0,1 0 0 0 0,-1 0 0 0 0,1-1-1 0 0,0 1 1 0 0,-1 0 0 0 0,1-1 0 0 0,-1 1 0 0 0,1-1 0 0 0,-1 1 0 0 0,1-1 0 0 0,-1 0-1 0 0,2 0 1 0 0,44-32 125 0 0,-36 24-75 0 0,69-52 187 0 0,129-74-1 0 0,-98 76-367 0 0,-109 58 6 0 0</inkml:trace>
+</inkml:ink>
+</file>
+
+<file path=ppt/ink/ink2.xml><?xml version="1.0" encoding="utf-8"?>
+<inkml:ink xmlns:inkml="http://www.w3.org/2003/InkML">
+  <inkml:definitions>
+    <inkml:context xml:id="ctx0">
+      <inkml:inkSource xml:id="inkSrc0">
+        <inkml:traceFormat>
+          <inkml:channel name="X" type="integer" min="-2.14748E9" max="2.14748E9" units="cm"/>
+          <inkml:channel name="Y" type="integer" min="-2.14748E9" max="2.14748E9" units="cm"/>
+          <inkml:channel name="F" type="integer" max="32767" units="dev"/>
+          <inkml:channel name="OA" type="integer" max="360" units="deg"/>
+          <inkml:channel name="OE" type="integer" max="90" units="deg"/>
+        </inkml:traceFormat>
+        <inkml:channelProperties>
+          <inkml:channelProperty channel="X" name="resolution" value="1000" units="1/cm"/>
+          <inkml:channelProperty channel="Y" name="resolution" value="1000" units="1/cm"/>
+          <inkml:channelProperty channel="F" name="resolution" value="0" units="1/dev"/>
+          <inkml:channelProperty channel="OA" name="resolution" value="1000" units="1/deg"/>
+          <inkml:channelProperty channel="OE" name="resolution" value="1000" units="1/deg"/>
+        </inkml:channelProperties>
+      </inkml:inkSource>
+      <inkml:timestamp xml:id="ts0" timeString="2026-06-24T05:32:07.841"/>
+    </inkml:context>
+    <inkml:brush xml:id="br0">
+      <inkml:brushProperty name="width" value="0.1" units="cm"/>
+      <inkml:brushProperty name="height" value="0.1" units="cm"/>
+      <inkml:brushProperty name="color" value="#FFC114"/>
+    </inkml:brush>
+  </inkml:definitions>
+  <inkml:trace contextRef="#ctx0" brushRef="#br0">2 420 5957 0 0,'-1'-7'95'0'0,"1"0"0"0"0,-1-1 1 0 0,1 1-1 0 0,1 0 1 0 0,-1 0-1 0 0,1 0 1 0 0,0 0-1 0 0,4-13 0 0 0,-3 13 293 0 0,-1 5-116 0 0,-2-12 286 0 0,3 12-314 0 0,7 23-253 0 0,1 0-1 0 0,1-1 0 0 0,1 0 0 0 0,1-1 0 0 0,0 0 0 0 0,2-1 0 0 0,0-1 1 0 0,26 23-1 0 0,0-10 770 0 0,-21-46-457 0 0,-4 2-183 0 0,-2-1 0 0 0,25-31-1 0 0,12-13 6 0 0,-11 23-64 0 0,0 2 1 0 0,3 2-1 0 0,85-49 1 0 0,-56 43-14 0 0,138-52 1 0 0,-171 76-44 0 0,-14 4-23 0 0,1 1-1 0 0,34-7 1 0 0,-58 15 5 0 0,-1 1-12 0 0,-1 1-1 0 0,1-1 0 0 0,-1 0 1 0 0,1 0-1 0 0,0 0 0 0 0,-1 0 1 0 0,1 0-1 0 0,-1 0 1 0 0,1 0-1 0 0,0 0 0 0 0,-1 0 1 0 0,1 0-1 0 0,-1 0 0 0 0,1 0 1 0 0,-1-1-1 0 0,1 1 0 0 0,0 0 1 0 0,-1 0-1 0 0,1 0 1 0 0,-1-1-1 0 0,1 1 0 0 0,-1 0 1 0 0,1-1-1 0 0,-1 1 0 0 0,0-1 1 0 0,1 1-1 0 0,-1 0 0 0 0,1-1 1 0 0,-1 1-1 0 0,0-1 1 0 0,1 1-1 0 0,-1-1 0 0 0,1 0 1 0 0,3-14-4563 0 0,-4 5 1887 0 0</inkml:trace>
+</inkml:ink>
+</file>
+
+<file path=ppt/ink/ink3.xml><?xml version="1.0" encoding="utf-8"?>
+<inkml:ink xmlns:inkml="http://www.w3.org/2003/InkML">
+  <inkml:definitions>
+    <inkml:context xml:id="ctx0">
+      <inkml:inkSource xml:id="inkSrc0">
+        <inkml:traceFormat>
+          <inkml:channel name="X" type="integer" min="-2.14748E9" max="2.14748E9" units="cm"/>
+          <inkml:channel name="Y" type="integer" min="-2.14748E9" max="2.14748E9" units="cm"/>
+          <inkml:channel name="F" type="integer" max="32767" units="dev"/>
+          <inkml:channel name="OA" type="integer" max="360" units="deg"/>
+          <inkml:channel name="OE" type="integer" max="90" units="deg"/>
+        </inkml:traceFormat>
+        <inkml:channelProperties>
+          <inkml:channelProperty channel="X" name="resolution" value="1000" units="1/cm"/>
+          <inkml:channelProperty channel="Y" name="resolution" value="1000" units="1/cm"/>
+          <inkml:channelProperty channel="F" name="resolution" value="0" units="1/dev"/>
+          <inkml:channelProperty channel="OA" name="resolution" value="1000" units="1/deg"/>
+          <inkml:channelProperty channel="OE" name="resolution" value="1000" units="1/deg"/>
+        </inkml:channelProperties>
+      </inkml:inkSource>
+      <inkml:timestamp xml:id="ts0" timeString="2026-06-24T05:32:10.142"/>
+    </inkml:context>
+    <inkml:brush xml:id="br0">
+      <inkml:brushProperty name="width" value="0.1" units="cm"/>
+      <inkml:brushProperty name="height" value="0.1" units="cm"/>
+      <inkml:brushProperty name="color" value="#FFC114"/>
+    </inkml:brush>
+  </inkml:definitions>
+  <inkml:trace contextRef="#ctx0" brushRef="#br0">0 487 6333 0 0,'0'0'-174'0'0,"14"-38"1293"0"0,33 128-1082 0 0,-27-52-68 0 0,-12-19 28 0 0,2-2 0 0 0,14 21 0 0 0,-23-36-7 0 0,-2-2 17 0 0,1 1 1 0 0,0-1-1 0 0,0 1 1 0 0,0-1 0 0 0,0 1-1 0 0,0-1 1 0 0,0 1 0 0 0,0-1-1 0 0,0 1 1 0 0,0 0-1 0 0,0-1 1 0 0,0 1 0 0 0,0-1-1 0 0,0 1 1 0 0,0-1-1 0 0,0 1 1 0 0,0-1 0 0 0,1 1-1 0 0,-1-1 1 0 0,0 1-1 0 0,0-1 1 0 0,1 1 0 0 0,-1-1-1 0 0,0 1 1 0 0,1-1-1 0 0,-1 0 1 0 0,0 1 0 0 0,1-1-1 0 0,-1 1 1 0 0,1-1-1 0 0,-1 0 1 0 0,0 0 0 0 0,1 1-1 0 0,-1-1 1 0 0,1 0-1 0 0,-1 0 1 0 0,1 1 0 0 0,-1-1-1 0 0,1 0 1 0 0,-1 0 0 0 0,1 0-1 0 0,0 0 1 0 0,-1 0-1 0 0,1 0 1 0 0,-1 0 0 0 0,1 0-1 0 0,-1 0 1 0 0,1 0-1 0 0,-1 0 1 0 0,1 0 0 0 0,-1 0-1 0 0,1 0 1 0 0,-1-1-1 0 0,1 1 1 0 0,-1 0 0 0 0,2-1-1 0 0,20-15 214 0 0,84-114 110 0 0,9-9-192 0 0,173-131 179 0 0,-251 236-164 0 0,9-6-13 0 0,-45 39-123 0 0,21-19-473 0 0,-32 5-3918 0 0,-2 13 2037 0 0</inkml:trace>
+</inkml:ink>
+</file>
+
+<file path=ppt/ink/ink4.xml><?xml version="1.0" encoding="utf-8"?>
+<inkml:ink xmlns:inkml="http://www.w3.org/2003/InkML">
+  <inkml:definitions>
+    <inkml:context xml:id="ctx0">
+      <inkml:inkSource xml:id="inkSrc0">
+        <inkml:traceFormat>
+          <inkml:channel name="X" type="integer" min="-2.14748E9" max="2.14748E9" units="cm"/>
+          <inkml:channel name="Y" type="integer" min="-2.14748E9" max="2.14748E9" units="cm"/>
+          <inkml:channel name="F" type="integer" max="32767" units="dev"/>
+          <inkml:channel name="OA" type="integer" max="360" units="deg"/>
+          <inkml:channel name="OE" type="integer" max="90" units="deg"/>
+        </inkml:traceFormat>
+        <inkml:channelProperties>
+          <inkml:channelProperty channel="X" name="resolution" value="1000" units="1/cm"/>
+          <inkml:channelProperty channel="Y" name="resolution" value="1000" units="1/cm"/>
+          <inkml:channelProperty channel="F" name="resolution" value="0" units="1/dev"/>
+          <inkml:channelProperty channel="OA" name="resolution" value="1000" units="1/deg"/>
+          <inkml:channelProperty channel="OE" name="resolution" value="1000" units="1/deg"/>
+        </inkml:channelProperties>
+      </inkml:inkSource>
+      <inkml:timestamp xml:id="ts0" timeString="2026-06-24T05:32:12.104"/>
+    </inkml:context>
+    <inkml:brush xml:id="br0">
+      <inkml:brushProperty name="width" value="0.1" units="cm"/>
+      <inkml:brushProperty name="height" value="0.1" units="cm"/>
+      <inkml:brushProperty name="color" value="#FFC114"/>
+    </inkml:brush>
+  </inkml:definitions>
+  <inkml:trace contextRef="#ctx0" brushRef="#br0">23 764 5849 0 0,'-16'-65'626'0'0,"15"63"-292"0"0,0-12 114 0 0,-1 4 350 0 0,0 4-782 0 0,2 4-21 0 0,1 13-17 0 0,0 0 19 0 0,1 0 1 0 0,1 0-1 0 0,0 0 1 0 0,0 0-1 0 0,1-1 0 0 0,7 14 1 0 0,-5-12 4 0 0,-1 0 0 0 0,-1 1 0 0 0,1-1 0 0 0,1 16 0 0 0,-4-19 75 0 0,1-1 0 0 0,0 0 0 0 0,0 0 0 0 0,0 0-1 0 0,1 0 1 0 0,9 13 0 0 0,-10-23-43 0 0,0-1 0 0 0,0 0 1 0 0,-1 0-1 0 0,1 0 0 0 0,0 0 0 0 0,-1 0 0 0 0,4-7 0 0 0,1 0 21 0 0,57-76 23 0 0,5 3 1 0 0,3 3-1 0 0,3 3 0 0 0,4 4 0 0 0,165-120 1 0 0,-108 107-58 0 0,59-41 8 0 0,-156 104-228 0 0,-38 22 51 0 0,1-14-2804 0 0,-8 3 901 0 0,2-3-165 0 0</inkml:trace>
+</inkml:ink>
+</file>
+
+<file path=ppt/ink/ink5.xml><?xml version="1.0" encoding="utf-8"?>
+<inkml:ink xmlns:inkml="http://www.w3.org/2003/InkML">
+  <inkml:definitions>
+    <inkml:context xml:id="ctx0">
+      <inkml:inkSource xml:id="inkSrc0">
+        <inkml:traceFormat>
+          <inkml:channel name="X" type="integer" min="-2.14748E9" max="2.14748E9" units="cm"/>
+          <inkml:channel name="Y" type="integer" min="-2.14748E9" max="2.14748E9" units="cm"/>
+          <inkml:channel name="F" type="integer" max="32767" units="dev"/>
+          <inkml:channel name="OA" type="integer" max="360" units="deg"/>
+          <inkml:channel name="OE" type="integer" max="90" units="deg"/>
+        </inkml:traceFormat>
+        <inkml:channelProperties>
+          <inkml:channelProperty channel="X" name="resolution" value="1000" units="1/cm"/>
+          <inkml:channelProperty channel="Y" name="resolution" value="1000" units="1/cm"/>
+          <inkml:channelProperty channel="F" name="resolution" value="0" units="1/dev"/>
+          <inkml:channelProperty channel="OA" name="resolution" value="1000" units="1/deg"/>
+          <inkml:channelProperty channel="OE" name="resolution" value="1000" units="1/deg"/>
+        </inkml:channelProperties>
+      </inkml:inkSource>
+      <inkml:timestamp xml:id="ts0" timeString="2026-06-24T05:32:16.528"/>
+    </inkml:context>
+    <inkml:brush xml:id="br0">
+      <inkml:brushProperty name="width" value="0.1" units="cm"/>
+      <inkml:brushProperty name="height" value="0.1" units="cm"/>
+      <inkml:brushProperty name="color" value="#FFC114"/>
+    </inkml:brush>
+  </inkml:definitions>
+  <inkml:trace contextRef="#ctx0" brushRef="#br0">11 361 6293 0 0,'0'0'-85'0'0,"-10"-55"1544"0"0,9 53-1407 0 0,4 15-92 0 0,1 0 40 0 0,0-1 0 0 0,1 0 0 0 0,0 0 0 0 0,0 0 0 0 0,9 12-1 0 0,-3-3 14 0 0,32 46 45 0 0,-39-61-40 0 0,-3-6-5 0 0,0 1 1 0 0,1-1-1 0 0,-1 1 0 0 0,0 0 0 0 0,0-1 0 0 0,0 0 0 0 0,1 1 0 0 0,-1-1 0 0 0,0 0 1 0 0,0 0-1 0 0,1 1 0 0 0,-1-1 0 0 0,0 0 0 0 0,1 0 0 0 0,-1-1 0 0 0,0 1 0 0 0,0 0 0 0 0,1 0 1 0 0,-1 0-1 0 0,0-1 0 0 0,0 1 0 0 0,1-1 0 0 0,-1 1 0 0 0,0-1 0 0 0,0 1 0 0 0,0-1 0 0 0,0 0 1 0 0,2-1-1 0 0,41-27 6 0 0,-36 23 15 0 0,102-69 43 0 0,168-84-1 0 0,137-32 1 0 0,-335 159-66 0 0,-77 31 16 0 0,5 14-4682 0 0</inkml:trace>
+</inkml:ink>
+</file>
+
+<file path=ppt/ink/ink6.xml><?xml version="1.0" encoding="utf-8"?>
+<inkml:ink xmlns:inkml="http://www.w3.org/2003/InkML">
+  <inkml:definitions>
+    <inkml:context xml:id="ctx0">
+      <inkml:inkSource xml:id="inkSrc0">
+        <inkml:traceFormat>
+          <inkml:channel name="X" type="integer" min="-2.14748E9" max="2.14748E9" units="cm"/>
+          <inkml:channel name="Y" type="integer" min="-2.14748E9" max="2.14748E9" units="cm"/>
+          <inkml:channel name="F" type="integer" max="32767" units="dev"/>
+          <inkml:channel name="OA" type="integer" max="360" units="deg"/>
+          <inkml:channel name="OE" type="integer" max="90" units="deg"/>
+        </inkml:traceFormat>
+        <inkml:channelProperties>
+          <inkml:channelProperty channel="X" name="resolution" value="1000" units="1/cm"/>
+          <inkml:channelProperty channel="Y" name="resolution" value="1000" units="1/cm"/>
+          <inkml:channelProperty channel="F" name="resolution" value="0" units="1/dev"/>
+          <inkml:channelProperty channel="OA" name="resolution" value="1000" units="1/deg"/>
+          <inkml:channelProperty channel="OE" name="resolution" value="1000" units="1/deg"/>
+        </inkml:channelProperties>
+      </inkml:inkSource>
+      <inkml:timestamp xml:id="ts0" timeString="2026-06-24T05:32:18.250"/>
+    </inkml:context>
+    <inkml:brush xml:id="br0">
+      <inkml:brushProperty name="width" value="0.1" units="cm"/>
+      <inkml:brushProperty name="height" value="0.1" units="cm"/>
+      <inkml:brushProperty name="color" value="#FFC114"/>
+    </inkml:brush>
+  </inkml:definitions>
+  <inkml:trace contextRef="#ctx0" brushRef="#br0">0 524 5128 0 0,'20'-27'683'0'0,"-20"27"-662"0"0,0-1-1 0 0,0 1 1 0 0,0 0-1 0 0,0-1 1 0 0,0 1-1 0 0,0-1 1 0 0,0 1 0 0 0,0-1-1 0 0,0 1 1 0 0,0 0-1 0 0,0-1 1 0 0,1 1-1 0 0,-1-1 1 0 0,0 1-1 0 0,0 0 1 0 0,0-1-1 0 0,1 1 1 0 0,-1 0 0 0 0,0-1-1 0 0,0 1 1 0 0,1 0-1 0 0,-1-1 1 0 0,0 1-1 0 0,1 0 1 0 0,-1-1-1 0 0,0 1 1 0 0,1 0 0 0 0,-1 0-1 0 0,1 0 1 0 0,-1-1-1 0 0,0 1 1 0 0,1 0-1 0 0,-1 0 1 0 0,1 0-1 0 0,-1 0 1 0 0,0 0-1 0 0,1 0 1 0 0,-1 0 0 0 0,1 0-1 0 0,-1 0 1 0 0,1 0-1 0 0,-1 0 1 0 0,0 0-1 0 0,1 0 1 0 0,-1 0-1 0 0,1 0 1 0 0,-1 0-1 0 0,1 1 1 0 0,-1-1 0 0 0,21 25 162 0 0,14 47-316 0 0,-35-70 157 0 0,88 170-16 0 0,-82-163-6 0 0,-5-7 11 0 0,13 15 34 0 0,-13-14-37 0 0,-1-2 26 0 0,1 0-13 0 0,-1 0 1 0 0,0-1-1 0 0,1 1 0 0 0,-1 0 1 0 0,0-1-1 0 0,1 1 1 0 0,-1 0-1 0 0,1-1 1 0 0,-1 1-1 0 0,1-1 1 0 0,-1 1-1 0 0,1-1 0 0 0,0 1 1 0 0,-1-1-1 0 0,1 1 1 0 0,0-1-1 0 0,-1 0 1 0 0,1 1-1 0 0,0-1 1 0 0,-1 0-1 0 0,1 1 0 0 0,0-1 1 0 0,0 0-1 0 0,-1 0 1 0 0,1 0-1 0 0,0 0 1 0 0,0 0-1 0 0,-1 0 1 0 0,2 0-1 0 0,23-17 41 0 0,-2-1 0 0 0,32-29 0 0 0,-6 3-27 0 0,202-154 131 0 0,303-181 0 0 0,-445 316 154 0 0,-107 62-308 0 0,14-11-771 0 0,-14-3-3485 0 0,-4 7 2464 0 0</inkml:trace>
+</inkml:ink>
+</file>
+
+<file path=ppt/ink/ink7.xml><?xml version="1.0" encoding="utf-8"?>
+<inkml:ink xmlns:inkml="http://www.w3.org/2003/InkML">
+  <inkml:definitions>
+    <inkml:context xml:id="ctx0">
+      <inkml:inkSource xml:id="inkSrc0">
+        <inkml:traceFormat>
+          <inkml:channel name="X" type="integer" min="-2.14748E9" max="2.14748E9" units="cm"/>
+          <inkml:channel name="Y" type="integer" min="-2.14748E9" max="2.14748E9" units="cm"/>
+          <inkml:channel name="F" type="integer" max="32767" units="dev"/>
+          <inkml:channel name="OA" type="integer" max="360" units="deg"/>
+          <inkml:channel name="OE" type="integer" max="90" units="deg"/>
+        </inkml:traceFormat>
+        <inkml:channelProperties>
+          <inkml:channelProperty channel="X" name="resolution" value="1000" units="1/cm"/>
+          <inkml:channelProperty channel="Y" name="resolution" value="1000" units="1/cm"/>
+          <inkml:channelProperty channel="F" name="resolution" value="0" units="1/dev"/>
+          <inkml:channelProperty channel="OA" name="resolution" value="1000" units="1/deg"/>
+          <inkml:channelProperty channel="OE" name="resolution" value="1000" units="1/deg"/>
+        </inkml:channelProperties>
+      </inkml:inkSource>
+      <inkml:timestamp xml:id="ts0" timeString="2026-06-24T05:32:42.569"/>
+    </inkml:context>
+    <inkml:brush xml:id="br0">
+      <inkml:brushProperty name="width" value="0.1" units="cm"/>
+      <inkml:brushProperty name="height" value="0.1" units="cm"/>
+      <inkml:brushProperty name="color" value="#FFC114"/>
+    </inkml:brush>
+  </inkml:definitions>
+  <inkml:trace contextRef="#ctx0" brushRef="#br0">59 109 5945 0 0,'0'0'-310'0'0,"-44"-21"830"0"0,31 19-231 0 0,11-2 271 0 0,24-3 98 0 0,147-20-607 0 0,-146 24-52 0 0,81-10 29 0 0,-88 11-27 0 0,97-4 9 0 0,203-1 0 0 0,-233 10-4 0 0,5 1 27 0 0,-55-5-28 0 0,-1 3 0 0 0,38 5 0 0 0,-65-7-4 0 0,212 3 606 0 0,144-23-356 0 0,-333 16-243 0 0,4 3 7 0 0,155-9 1530 0 0,-186 12-1475 0 0,5 4-34 0 0,-5-4-48 0 0,-7 4-1743 0 0,-6 7-1814 0 0,6-5 413 0 0</inkml:trace>
+</inkml:ink>
+</file>
+
+<file path=ppt/ink/ink8.xml><?xml version="1.0" encoding="utf-8"?>
+<inkml:ink xmlns:inkml="http://www.w3.org/2003/InkML">
+  <inkml:definitions>
+    <inkml:context xml:id="ctx0">
+      <inkml:inkSource xml:id="inkSrc0">
+        <inkml:traceFormat>
+          <inkml:channel name="X" type="integer" min="-2.14748E9" max="2.14748E9" units="cm"/>
+          <inkml:channel name="Y" type="integer" min="-2.14748E9" max="2.14748E9" units="cm"/>
+          <inkml:channel name="F" type="integer" max="32767" units="dev"/>
+          <inkml:channel name="OA" type="integer" max="360" units="deg"/>
+          <inkml:channel name="OE" type="integer" max="90" units="deg"/>
+        </inkml:traceFormat>
+        <inkml:channelProperties>
+          <inkml:channelProperty channel="X" name="resolution" value="1000" units="1/cm"/>
+          <inkml:channelProperty channel="Y" name="resolution" value="1000" units="1/cm"/>
+          <inkml:channelProperty channel="F" name="resolution" value="0" units="1/dev"/>
+          <inkml:channelProperty channel="OA" name="resolution" value="1000" units="1/deg"/>
+          <inkml:channelProperty channel="OE" name="resolution" value="1000" units="1/deg"/>
+        </inkml:channelProperties>
+      </inkml:inkSource>
+      <inkml:timestamp xml:id="ts0" timeString="2026-06-24T05:32:44.039"/>
+    </inkml:context>
+    <inkml:brush xml:id="br0">
+      <inkml:brushProperty name="width" value="0.1" units="cm"/>
+      <inkml:brushProperty name="height" value="0.1" units="cm"/>
+      <inkml:brushProperty name="color" value="#FFC114"/>
+    </inkml:brush>
+  </inkml:definitions>
+  <inkml:trace contextRef="#ctx0" brushRef="#br0">58 206 6541 0 0,'0'0'-322'0'0,"-21"0"-439"0"0,5 0 834 0 0,12 0 848 0 0,-8 6-602 0 0,8-2 32 0 0,8-3-218 0 0,27-6-132 0 0,-1 1-1 0 0,44 0 0 0 0,-29 3 5 0 0,396-23 3 0 0,-234 19 45 0 0,-108-1 19 0 0,1-4 0 0 0,103-24-1 0 0,421-47 131 0 0,-517 74 206 0 0,-103 6-203 0 0,5 2 96 0 0,-9-1-340 0 0,0 0 0 0 0,0 0-40 0 0,-1 0 39 0 0,1 0 1 0 0,0 0 0 0 0,0 0-1 0 0,0-1 1 0 0,0 1 0 0 0,0 0-1 0 0,0 0 1 0 0,0 0-1 0 0,0 0 1 0 0,0 0 0 0 0,0 0-1 0 0,0 0 1 0 0,0-1 0 0 0,0 1-1 0 0,0 0 1 0 0,0 0 0 0 0,0 0-1 0 0,0 0 1 0 0,0 0-1 0 0,0-1 1 0 0,0 1 0 0 0,0 0-1 0 0,0 0 1 0 0,0 0 0 0 0,0 0-1 0 0,0 0 1 0 0,0 0 0 0 0,0 0-1 0 0,0-1 1 0 0,0 1-1 0 0,1 0 1 0 0,-1 0 0 0 0,0 0-1 0 0,0 0 1 0 0,0 0 0 0 0,0 0-1 0 0,0 0 1 0 0,0 0-1 0 0,0 0 1 0 0,0-1 0 0 0,1 1-1 0 0,-1 0 1 0 0,0 0 0 0 0,0 0-1 0 0,0 0 1 0 0,0 0 0 0 0,0 0-1 0 0,0 0 1 0 0,0 0-1 0 0,1 0 1 0 0,-1 0 0 0 0,0 0-1 0 0,0 0 1 0 0,0 0 0 0 0,0 0-1 0 0,-19-18-2043 0 0,10 6-269 0 0</inkml:trace>
+</inkml:ink>
+</file>
+
+<file path=ppt/ink/ink9.xml><?xml version="1.0" encoding="utf-8"?>
+<inkml:ink xmlns:inkml="http://www.w3.org/2003/InkML">
+  <inkml:definitions>
+    <inkml:context xml:id="ctx0">
+      <inkml:inkSource xml:id="inkSrc0">
+        <inkml:traceFormat>
+          <inkml:channel name="X" type="integer" min="-2.14748E9" max="2.14748E9" units="cm"/>
+          <inkml:channel name="Y" type="integer" min="-2.14748E9" max="2.14748E9" units="cm"/>
+          <inkml:channel name="F" type="integer" max="32767" units="dev"/>
+          <inkml:channel name="OA" type="integer" max="360" units="deg"/>
+          <inkml:channel name="OE" type="integer" max="90" units="deg"/>
+        </inkml:traceFormat>
+        <inkml:channelProperties>
+          <inkml:channelProperty channel="X" name="resolution" value="1000" units="1/cm"/>
+          <inkml:channelProperty channel="Y" name="resolution" value="1000" units="1/cm"/>
+          <inkml:channelProperty channel="F" name="resolution" value="0" units="1/dev"/>
+          <inkml:channelProperty channel="OA" name="resolution" value="1000" units="1/deg"/>
+          <inkml:channelProperty channel="OE" name="resolution" value="1000" units="1/deg"/>
+        </inkml:channelProperties>
+      </inkml:inkSource>
+      <inkml:timestamp xml:id="ts0" timeString="2026-06-24T05:32:45.372"/>
+    </inkml:context>
+    <inkml:brush xml:id="br0">
+      <inkml:brushProperty name="width" value="0.1" units="cm"/>
+      <inkml:brushProperty name="height" value="0.1" units="cm"/>
+      <inkml:brushProperty name="color" value="#FFC114"/>
+    </inkml:brush>
+  </inkml:definitions>
+  <inkml:trace contextRef="#ctx0" brushRef="#br0">94 218 5725 0 0,'-44'-37'231'0'0,"23"16"1110"0"0,20 20-1121 0 0,-4-5 219 0 0,-18-8 500 0 0,90 110-1028 0 0,-41-63 70 0 0,-15-18 12 0 0,1 0 0 0 0,25 23-1 0 0,-9-8 391 0 0,-22-32-341 0 0,23-17-3 0 0,0 0 0 0 0,-2-2 1 0 0,37-35-1 0 0,33-26 9 0 0,-40 36-18 0 0,-30 23-11 0 0,1 2 1 0 0,35-21-1 0 0,-52 31-16 0 0,-10 10-17 0 0,20-22-5034 0 0</inkml:trace>
+</inkml:ink>
 </file>
 
 <file path=ppt/notesMasters/notesMaster1.xml><?xml version="1.0" encoding="utf-8"?>
@@ -397,7 +717,7 @@
           <a:p>
             <a:fld id="{CB233BD1-3BA8-448D-9D08-7846095EA517}" type="datetimeFigureOut">
               <a:rPr lang="en-US" smtClean="0"/>
-              <a:t>6/22/2026</a:t>
+              <a:t>6/24/2026</a:t>
             </a:fld>
             <a:endParaRPr lang="en-US"/>
           </a:p>
@@ -811,7 +1131,7 @@
           <a:p>
             <a:fld id="{6383FAE1-13DE-4511-8C1B-C8AFB720664C}" type="datetimeFigureOut">
               <a:rPr lang="en-US" smtClean="0"/>
-              <a:t>6/22/2026</a:t>
+              <a:t>6/24/2026</a:t>
             </a:fld>
             <a:endParaRPr lang="en-US"/>
           </a:p>
@@ -1009,7 +1329,7 @@
           <a:p>
             <a:fld id="{6383FAE1-13DE-4511-8C1B-C8AFB720664C}" type="datetimeFigureOut">
               <a:rPr lang="en-US" smtClean="0"/>
-              <a:t>6/22/2026</a:t>
+              <a:t>6/24/2026</a:t>
             </a:fld>
             <a:endParaRPr lang="en-US"/>
           </a:p>
@@ -1217,7 +1537,7 @@
           <a:p>
             <a:fld id="{6383FAE1-13DE-4511-8C1B-C8AFB720664C}" type="datetimeFigureOut">
               <a:rPr lang="en-US" smtClean="0"/>
-              <a:t>6/22/2026</a:t>
+              <a:t>6/24/2026</a:t>
             </a:fld>
             <a:endParaRPr lang="en-US"/>
           </a:p>
@@ -1415,7 +1735,7 @@
           <a:p>
             <a:fld id="{6383FAE1-13DE-4511-8C1B-C8AFB720664C}" type="datetimeFigureOut">
               <a:rPr lang="en-US" smtClean="0"/>
-              <a:t>6/22/2026</a:t>
+              <a:t>6/24/2026</a:t>
             </a:fld>
             <a:endParaRPr lang="en-US"/>
           </a:p>
@@ -1690,7 +2010,7 @@
           <a:p>
             <a:fld id="{6383FAE1-13DE-4511-8C1B-C8AFB720664C}" type="datetimeFigureOut">
               <a:rPr lang="en-US" smtClean="0"/>
-              <a:t>6/22/2026</a:t>
+              <a:t>6/24/2026</a:t>
             </a:fld>
             <a:endParaRPr lang="en-US"/>
           </a:p>
@@ -1955,7 +2275,7 @@
           <a:p>
             <a:fld id="{6383FAE1-13DE-4511-8C1B-C8AFB720664C}" type="datetimeFigureOut">
               <a:rPr lang="en-US" smtClean="0"/>
-              <a:t>6/22/2026</a:t>
+              <a:t>6/24/2026</a:t>
             </a:fld>
             <a:endParaRPr lang="en-US"/>
           </a:p>
@@ -2367,7 +2687,7 @@
           <a:p>
             <a:fld id="{6383FAE1-13DE-4511-8C1B-C8AFB720664C}" type="datetimeFigureOut">
               <a:rPr lang="en-US" smtClean="0"/>
-              <a:t>6/22/2026</a:t>
+              <a:t>6/24/2026</a:t>
             </a:fld>
             <a:endParaRPr lang="en-US"/>
           </a:p>
@@ -2508,7 +2828,7 @@
           <a:p>
             <a:fld id="{6383FAE1-13DE-4511-8C1B-C8AFB720664C}" type="datetimeFigureOut">
               <a:rPr lang="en-US" smtClean="0"/>
-              <a:t>6/22/2026</a:t>
+              <a:t>6/24/2026</a:t>
             </a:fld>
             <a:endParaRPr lang="en-US"/>
           </a:p>
@@ -2621,7 +2941,7 @@
           <a:p>
             <a:fld id="{6383FAE1-13DE-4511-8C1B-C8AFB720664C}" type="datetimeFigureOut">
               <a:rPr lang="en-US" smtClean="0"/>
-              <a:t>6/22/2026</a:t>
+              <a:t>6/24/2026</a:t>
             </a:fld>
             <a:endParaRPr lang="en-US"/>
           </a:p>
@@ -2932,7 +3252,7 @@
           <a:p>
             <a:fld id="{6383FAE1-13DE-4511-8C1B-C8AFB720664C}" type="datetimeFigureOut">
               <a:rPr lang="en-US" smtClean="0"/>
-              <a:t>6/22/2026</a:t>
+              <a:t>6/24/2026</a:t>
             </a:fld>
             <a:endParaRPr lang="en-US"/>
           </a:p>
@@ -3223,7 +3543,7 @@
           <a:p>
             <a:fld id="{6383FAE1-13DE-4511-8C1B-C8AFB720664C}" type="datetimeFigureOut">
               <a:rPr lang="en-US" smtClean="0"/>
-              <a:t>6/22/2026</a:t>
+              <a:t>6/24/2026</a:t>
             </a:fld>
             <a:endParaRPr lang="en-US"/>
           </a:p>
@@ -3467,7 +3787,7 @@
           <a:p>
             <a:fld id="{6383FAE1-13DE-4511-8C1B-C8AFB720664C}" type="datetimeFigureOut">
               <a:rPr lang="en-US" smtClean="0"/>
-              <a:t>6/22/2026</a:t>
+              <a:t>6/24/2026</a:t>
             </a:fld>
             <a:endParaRPr lang="en-US"/>
           </a:p>
@@ -4190,7 +4510,7 @@
         </p:blipFill>
         <p:spPr>
           <a:xfrm>
-            <a:off x="238426" y="560463"/>
+            <a:off x="146420" y="1913775"/>
             <a:ext cx="5949580" cy="3398248"/>
           </a:xfrm>
           <a:prstGeom prst="rect">
@@ -4220,7 +4540,7 @@
         </p:blipFill>
         <p:spPr>
           <a:xfrm>
-            <a:off x="6514822" y="2259587"/>
+            <a:off x="6616088" y="2497331"/>
             <a:ext cx="5575912" cy="3910660"/>
           </a:xfrm>
           <a:prstGeom prst="rect">
@@ -4228,6 +4548,210 @@
           </a:prstGeom>
         </p:spPr>
       </p:pic>
+      <mc:AlternateContent xmlns:mc="http://schemas.openxmlformats.org/markup-compatibility/2006">
+        <mc:Choice xmlns:p14="http://schemas.microsoft.com/office/powerpoint/2010/main" Requires="p14">
+          <p:contentPart p14:bwMode="auto" r:id="rId4">
+            <p14:nvContentPartPr>
+              <p14:cNvPr id="2" name="Ink 1">
+                <a:extLst>
+                  <a:ext uri="{FF2B5EF4-FFF2-40B4-BE49-F238E27FC236}">
+                    <a16:creationId xmlns:a16="http://schemas.microsoft.com/office/drawing/2014/main" id="{3E7563EC-47D3-4F81-1037-F5F2E6394675}"/>
+                  </a:ext>
+                </a:extLst>
+              </p14:cNvPr>
+              <p14:cNvContentPartPr/>
+              <p14:nvPr/>
+            </p14:nvContentPartPr>
+            <p14:xfrm>
+              <a:off x="3372984" y="3231936"/>
+              <a:ext cx="308520" cy="214560"/>
+            </p14:xfrm>
+          </p:contentPart>
+        </mc:Choice>
+        <mc:Fallback>
+          <p:pic>
+            <p:nvPicPr>
+              <p:cNvPr id="2" name="Ink 1">
+                <a:extLst>
+                  <a:ext uri="{FF2B5EF4-FFF2-40B4-BE49-F238E27FC236}">
+                    <a16:creationId xmlns:a16="http://schemas.microsoft.com/office/drawing/2014/main" id="{3E7563EC-47D3-4F81-1037-F5F2E6394675}"/>
+                  </a:ext>
+                </a:extLst>
+              </p:cNvPr>
+              <p:cNvPicPr/>
+              <p:nvPr/>
+            </p:nvPicPr>
+            <p:blipFill>
+              <a:blip r:embed="rId5"/>
+              <a:stretch>
+                <a:fillRect/>
+              </a:stretch>
+            </p:blipFill>
+            <p:spPr>
+              <a:xfrm>
+                <a:off x="3354984" y="3214296"/>
+                <a:ext cx="344160" cy="250200"/>
+              </a:xfrm>
+              <a:prstGeom prst="rect">
+                <a:avLst/>
+              </a:prstGeom>
+            </p:spPr>
+          </p:pic>
+        </mc:Fallback>
+      </mc:AlternateContent>
+      <mc:AlternateContent xmlns:mc="http://schemas.openxmlformats.org/markup-compatibility/2006">
+        <mc:Choice xmlns:p14="http://schemas.microsoft.com/office/powerpoint/2010/main" Requires="p14">
+          <p:contentPart p14:bwMode="auto" r:id="rId6">
+            <p14:nvContentPartPr>
+              <p14:cNvPr id="4" name="Ink 3">
+                <a:extLst>
+                  <a:ext uri="{FF2B5EF4-FFF2-40B4-BE49-F238E27FC236}">
+                    <a16:creationId xmlns:a16="http://schemas.microsoft.com/office/drawing/2014/main" id="{1D5E8B8B-6059-388B-2755-9F0496C636E2}"/>
+                  </a:ext>
+                </a:extLst>
+              </p14:cNvPr>
+              <p14:cNvContentPartPr/>
+              <p14:nvPr/>
+            </p14:nvContentPartPr>
+            <p14:xfrm>
+              <a:off x="11408544" y="3829536"/>
+              <a:ext cx="374400" cy="195840"/>
+            </p14:xfrm>
+          </p:contentPart>
+        </mc:Choice>
+        <mc:Fallback>
+          <p:pic>
+            <p:nvPicPr>
+              <p:cNvPr id="4" name="Ink 3">
+                <a:extLst>
+                  <a:ext uri="{FF2B5EF4-FFF2-40B4-BE49-F238E27FC236}">
+                    <a16:creationId xmlns:a16="http://schemas.microsoft.com/office/drawing/2014/main" id="{1D5E8B8B-6059-388B-2755-9F0496C636E2}"/>
+                  </a:ext>
+                </a:extLst>
+              </p:cNvPr>
+              <p:cNvPicPr/>
+              <p:nvPr/>
+            </p:nvPicPr>
+            <p:blipFill>
+              <a:blip r:embed="rId7"/>
+              <a:stretch>
+                <a:fillRect/>
+              </a:stretch>
+            </p:blipFill>
+            <p:spPr>
+              <a:xfrm>
+                <a:off x="11390544" y="3811536"/>
+                <a:ext cx="410040" cy="231480"/>
+              </a:xfrm>
+              <a:prstGeom prst="rect">
+                <a:avLst/>
+              </a:prstGeom>
+            </p:spPr>
+          </p:pic>
+        </mc:Fallback>
+      </mc:AlternateContent>
+      <mc:AlternateContent xmlns:mc="http://schemas.openxmlformats.org/markup-compatibility/2006">
+        <mc:Choice xmlns:p14="http://schemas.microsoft.com/office/powerpoint/2010/main" Requires="p14">
+          <p:contentPart p14:bwMode="auto" r:id="rId8">
+            <p14:nvContentPartPr>
+              <p14:cNvPr id="5" name="Ink 4">
+                <a:extLst>
+                  <a:ext uri="{FF2B5EF4-FFF2-40B4-BE49-F238E27FC236}">
+                    <a16:creationId xmlns:a16="http://schemas.microsoft.com/office/drawing/2014/main" id="{F5560C1A-6196-ADA2-5019-701FA6FBD09C}"/>
+                  </a:ext>
+                </a:extLst>
+              </p14:cNvPr>
+              <p14:cNvContentPartPr/>
+              <p14:nvPr/>
+            </p14:nvContentPartPr>
+            <p14:xfrm>
+              <a:off x="5572944" y="4702176"/>
+              <a:ext cx="280800" cy="241200"/>
+            </p14:xfrm>
+          </p:contentPart>
+        </mc:Choice>
+        <mc:Fallback>
+          <p:pic>
+            <p:nvPicPr>
+              <p:cNvPr id="5" name="Ink 4">
+                <a:extLst>
+                  <a:ext uri="{FF2B5EF4-FFF2-40B4-BE49-F238E27FC236}">
+                    <a16:creationId xmlns:a16="http://schemas.microsoft.com/office/drawing/2014/main" id="{F5560C1A-6196-ADA2-5019-701FA6FBD09C}"/>
+                  </a:ext>
+                </a:extLst>
+              </p:cNvPr>
+              <p:cNvPicPr/>
+              <p:nvPr/>
+            </p:nvPicPr>
+            <p:blipFill>
+              <a:blip r:embed="rId9"/>
+              <a:stretch>
+                <a:fillRect/>
+              </a:stretch>
+            </p:blipFill>
+            <p:spPr>
+              <a:xfrm>
+                <a:off x="5554944" y="4684536"/>
+                <a:ext cx="316440" cy="276840"/>
+              </a:xfrm>
+              <a:prstGeom prst="rect">
+                <a:avLst/>
+              </a:prstGeom>
+            </p:spPr>
+          </p:pic>
+        </mc:Fallback>
+      </mc:AlternateContent>
+      <mc:AlternateContent xmlns:mc="http://schemas.openxmlformats.org/markup-compatibility/2006">
+        <mc:Choice xmlns:p14="http://schemas.microsoft.com/office/powerpoint/2010/main" Requires="p14">
+          <p:contentPart p14:bwMode="auto" r:id="rId10">
+            <p14:nvContentPartPr>
+              <p14:cNvPr id="6" name="Ink 5">
+                <a:extLst>
+                  <a:ext uri="{FF2B5EF4-FFF2-40B4-BE49-F238E27FC236}">
+                    <a16:creationId xmlns:a16="http://schemas.microsoft.com/office/drawing/2014/main" id="{915EC175-B0C0-FC8B-6BC0-D3133EBBE265}"/>
+                  </a:ext>
+                </a:extLst>
+              </p14:cNvPr>
+              <p14:cNvContentPartPr/>
+              <p14:nvPr/>
+            </p14:nvContentPartPr>
+            <p14:xfrm>
+              <a:off x="10731744" y="5835456"/>
+              <a:ext cx="393840" cy="328320"/>
+            </p14:xfrm>
+          </p:contentPart>
+        </mc:Choice>
+        <mc:Fallback>
+          <p:pic>
+            <p:nvPicPr>
+              <p:cNvPr id="6" name="Ink 5">
+                <a:extLst>
+                  <a:ext uri="{FF2B5EF4-FFF2-40B4-BE49-F238E27FC236}">
+                    <a16:creationId xmlns:a16="http://schemas.microsoft.com/office/drawing/2014/main" id="{915EC175-B0C0-FC8B-6BC0-D3133EBBE265}"/>
+                  </a:ext>
+                </a:extLst>
+              </p:cNvPr>
+              <p:cNvPicPr/>
+              <p:nvPr/>
+            </p:nvPicPr>
+            <p:blipFill>
+              <a:blip r:embed="rId11"/>
+              <a:stretch>
+                <a:fillRect/>
+              </a:stretch>
+            </p:blipFill>
+            <p:spPr>
+              <a:xfrm>
+                <a:off x="10714104" y="5817816"/>
+                <a:ext cx="429480" cy="363960"/>
+              </a:xfrm>
+              <a:prstGeom prst="rect">
+                <a:avLst/>
+              </a:prstGeom>
+            </p:spPr>
+          </p:pic>
+        </mc:Fallback>
+      </mc:AlternateContent>
     </p:spTree>
     <p:extLst>
       <p:ext uri="{BB962C8B-B14F-4D97-AF65-F5344CB8AC3E}">
@@ -4328,7 +4852,7 @@
         </p:blipFill>
         <p:spPr>
           <a:xfrm>
-            <a:off x="1577057" y="1380744"/>
+            <a:off x="708377" y="1792224"/>
             <a:ext cx="6670985" cy="3123409"/>
           </a:xfrm>
           <a:prstGeom prst="rect">
@@ -4336,6 +4860,108 @@
           </a:prstGeom>
         </p:spPr>
       </p:pic>
+      <mc:AlternateContent xmlns:mc="http://schemas.openxmlformats.org/markup-compatibility/2006">
+        <mc:Choice xmlns:p14="http://schemas.microsoft.com/office/powerpoint/2010/main" Requires="p14">
+          <p:contentPart p14:bwMode="auto" r:id="rId3">
+            <p14:nvContentPartPr>
+              <p14:cNvPr id="2" name="Ink 1">
+                <a:extLst>
+                  <a:ext uri="{FF2B5EF4-FFF2-40B4-BE49-F238E27FC236}">
+                    <a16:creationId xmlns:a16="http://schemas.microsoft.com/office/drawing/2014/main" id="{6A029202-DE3F-7076-02AB-7E50A40831FD}"/>
+                  </a:ext>
+                </a:extLst>
+              </p14:cNvPr>
+              <p14:cNvContentPartPr/>
+              <p14:nvPr/>
+            </p14:nvContentPartPr>
+            <p14:xfrm>
+              <a:off x="4650624" y="3187656"/>
+              <a:ext cx="389520" cy="180360"/>
+            </p14:xfrm>
+          </p:contentPart>
+        </mc:Choice>
+        <mc:Fallback>
+          <p:pic>
+            <p:nvPicPr>
+              <p:cNvPr id="2" name="Ink 1">
+                <a:extLst>
+                  <a:ext uri="{FF2B5EF4-FFF2-40B4-BE49-F238E27FC236}">
+                    <a16:creationId xmlns:a16="http://schemas.microsoft.com/office/drawing/2014/main" id="{6A029202-DE3F-7076-02AB-7E50A40831FD}"/>
+                  </a:ext>
+                </a:extLst>
+              </p:cNvPr>
+              <p:cNvPicPr/>
+              <p:nvPr/>
+            </p:nvPicPr>
+            <p:blipFill>
+              <a:blip r:embed="rId4"/>
+              <a:stretch>
+                <a:fillRect/>
+              </a:stretch>
+            </p:blipFill>
+            <p:spPr>
+              <a:xfrm>
+                <a:off x="4632624" y="3169656"/>
+                <a:ext cx="425160" cy="216000"/>
+              </a:xfrm>
+              <a:prstGeom prst="rect">
+                <a:avLst/>
+              </a:prstGeom>
+            </p:spPr>
+          </p:pic>
+        </mc:Fallback>
+      </mc:AlternateContent>
+      <mc:AlternateContent xmlns:mc="http://schemas.openxmlformats.org/markup-compatibility/2006">
+        <mc:Choice xmlns:p14="http://schemas.microsoft.com/office/powerpoint/2010/main" Requires="p14">
+          <p:contentPart p14:bwMode="auto" r:id="rId5">
+            <p14:nvContentPartPr>
+              <p14:cNvPr id="4" name="Ink 3">
+                <a:extLst>
+                  <a:ext uri="{FF2B5EF4-FFF2-40B4-BE49-F238E27FC236}">
+                    <a16:creationId xmlns:a16="http://schemas.microsoft.com/office/drawing/2014/main" id="{AD3D9F64-C86D-D743-049A-1CAB74982BBE}"/>
+                  </a:ext>
+                </a:extLst>
+              </p14:cNvPr>
+              <p14:cNvContentPartPr/>
+              <p14:nvPr/>
+            </p14:nvContentPartPr>
+            <p14:xfrm>
+              <a:off x="3496464" y="4492656"/>
+              <a:ext cx="470160" cy="289080"/>
+            </p14:xfrm>
+          </p:contentPart>
+        </mc:Choice>
+        <mc:Fallback>
+          <p:pic>
+            <p:nvPicPr>
+              <p:cNvPr id="4" name="Ink 3">
+                <a:extLst>
+                  <a:ext uri="{FF2B5EF4-FFF2-40B4-BE49-F238E27FC236}">
+                    <a16:creationId xmlns:a16="http://schemas.microsoft.com/office/drawing/2014/main" id="{AD3D9F64-C86D-D743-049A-1CAB74982BBE}"/>
+                  </a:ext>
+                </a:extLst>
+              </p:cNvPr>
+              <p:cNvPicPr/>
+              <p:nvPr/>
+            </p:nvPicPr>
+            <p:blipFill>
+              <a:blip r:embed="rId6"/>
+              <a:stretch>
+                <a:fillRect/>
+              </a:stretch>
+            </p:blipFill>
+            <p:spPr>
+              <a:xfrm>
+                <a:off x="3478464" y="4474656"/>
+                <a:ext cx="505800" cy="324720"/>
+              </a:xfrm>
+              <a:prstGeom prst="rect">
+                <a:avLst/>
+              </a:prstGeom>
+            </p:spPr>
+          </p:pic>
+        </mc:Fallback>
+      </mc:AlternateContent>
     </p:spTree>
     <p:extLst>
       <p:ext uri="{BB962C8B-B14F-4D97-AF65-F5344CB8AC3E}">
@@ -4534,6 +5160,210 @@
           </a:prstGeom>
         </p:spPr>
       </p:pic>
+      <mc:AlternateContent xmlns:mc="http://schemas.openxmlformats.org/markup-compatibility/2006">
+        <mc:Choice xmlns:p14="http://schemas.microsoft.com/office/powerpoint/2010/main" Requires="p14">
+          <p:contentPart p14:bwMode="auto" r:id="rId6">
+            <p14:nvContentPartPr>
+              <p14:cNvPr id="5" name="Ink 4">
+                <a:extLst>
+                  <a:ext uri="{FF2B5EF4-FFF2-40B4-BE49-F238E27FC236}">
+                    <a16:creationId xmlns:a16="http://schemas.microsoft.com/office/drawing/2014/main" id="{0DFBBD2F-9E36-28F8-17A0-2D162C0E5ECA}"/>
+                  </a:ext>
+                </a:extLst>
+              </p14:cNvPr>
+              <p14:cNvContentPartPr/>
+              <p14:nvPr/>
+            </p14:nvContentPartPr>
+            <p14:xfrm>
+              <a:off x="9467784" y="3441096"/>
+              <a:ext cx="686880" cy="39600"/>
+            </p14:xfrm>
+          </p:contentPart>
+        </mc:Choice>
+        <mc:Fallback>
+          <p:pic>
+            <p:nvPicPr>
+              <p:cNvPr id="5" name="Ink 4">
+                <a:extLst>
+                  <a:ext uri="{FF2B5EF4-FFF2-40B4-BE49-F238E27FC236}">
+                    <a16:creationId xmlns:a16="http://schemas.microsoft.com/office/drawing/2014/main" id="{0DFBBD2F-9E36-28F8-17A0-2D162C0E5ECA}"/>
+                  </a:ext>
+                </a:extLst>
+              </p:cNvPr>
+              <p:cNvPicPr/>
+              <p:nvPr/>
+            </p:nvPicPr>
+            <p:blipFill>
+              <a:blip r:embed="rId7"/>
+              <a:stretch>
+                <a:fillRect/>
+              </a:stretch>
+            </p:blipFill>
+            <p:spPr>
+              <a:xfrm>
+                <a:off x="9449784" y="3423096"/>
+                <a:ext cx="722520" cy="75240"/>
+              </a:xfrm>
+              <a:prstGeom prst="rect">
+                <a:avLst/>
+              </a:prstGeom>
+            </p:spPr>
+          </p:pic>
+        </mc:Fallback>
+      </mc:AlternateContent>
+      <mc:AlternateContent xmlns:mc="http://schemas.openxmlformats.org/markup-compatibility/2006">
+        <mc:Choice xmlns:p14="http://schemas.microsoft.com/office/powerpoint/2010/main" Requires="p14">
+          <p:contentPart p14:bwMode="auto" r:id="rId8">
+            <p14:nvContentPartPr>
+              <p14:cNvPr id="7" name="Ink 6">
+                <a:extLst>
+                  <a:ext uri="{FF2B5EF4-FFF2-40B4-BE49-F238E27FC236}">
+                    <a16:creationId xmlns:a16="http://schemas.microsoft.com/office/drawing/2014/main" id="{A217B9C8-12B2-59AC-37B7-83F37385B807}"/>
+                  </a:ext>
+                </a:extLst>
+              </p14:cNvPr>
+              <p14:cNvContentPartPr/>
+              <p14:nvPr/>
+            </p14:nvContentPartPr>
+            <p14:xfrm>
+              <a:off x="9816624" y="3726216"/>
+              <a:ext cx="713520" cy="78120"/>
+            </p14:xfrm>
+          </p:contentPart>
+        </mc:Choice>
+        <mc:Fallback>
+          <p:pic>
+            <p:nvPicPr>
+              <p:cNvPr id="7" name="Ink 6">
+                <a:extLst>
+                  <a:ext uri="{FF2B5EF4-FFF2-40B4-BE49-F238E27FC236}">
+                    <a16:creationId xmlns:a16="http://schemas.microsoft.com/office/drawing/2014/main" id="{A217B9C8-12B2-59AC-37B7-83F37385B807}"/>
+                  </a:ext>
+                </a:extLst>
+              </p:cNvPr>
+              <p:cNvPicPr/>
+              <p:nvPr/>
+            </p:nvPicPr>
+            <p:blipFill>
+              <a:blip r:embed="rId9"/>
+              <a:stretch>
+                <a:fillRect/>
+              </a:stretch>
+            </p:blipFill>
+            <p:spPr>
+              <a:xfrm>
+                <a:off x="9798984" y="3708576"/>
+                <a:ext cx="749160" cy="113760"/>
+              </a:xfrm>
+              <a:prstGeom prst="rect">
+                <a:avLst/>
+              </a:prstGeom>
+            </p:spPr>
+          </p:pic>
+        </mc:Fallback>
+      </mc:AlternateContent>
+      <mc:AlternateContent xmlns:mc="http://schemas.openxmlformats.org/markup-compatibility/2006">
+        <mc:Choice xmlns:p14="http://schemas.microsoft.com/office/powerpoint/2010/main" Requires="p14">
+          <p:contentPart p14:bwMode="auto" r:id="rId10">
+            <p14:nvContentPartPr>
+              <p14:cNvPr id="8" name="Ink 7">
+                <a:extLst>
+                  <a:ext uri="{FF2B5EF4-FFF2-40B4-BE49-F238E27FC236}">
+                    <a16:creationId xmlns:a16="http://schemas.microsoft.com/office/drawing/2014/main" id="{A9FCB3D7-B125-282D-DF12-609EA87D3A6D}"/>
+                  </a:ext>
+                </a:extLst>
+              </p14:cNvPr>
+              <p14:cNvContentPartPr/>
+              <p14:nvPr/>
+            </p14:nvContentPartPr>
+            <p14:xfrm>
+              <a:off x="9989424" y="3086136"/>
+              <a:ext cx="230760" cy="132120"/>
+            </p14:xfrm>
+          </p:contentPart>
+        </mc:Choice>
+        <mc:Fallback>
+          <p:pic>
+            <p:nvPicPr>
+              <p:cNvPr id="8" name="Ink 7">
+                <a:extLst>
+                  <a:ext uri="{FF2B5EF4-FFF2-40B4-BE49-F238E27FC236}">
+                    <a16:creationId xmlns:a16="http://schemas.microsoft.com/office/drawing/2014/main" id="{A9FCB3D7-B125-282D-DF12-609EA87D3A6D}"/>
+                  </a:ext>
+                </a:extLst>
+              </p:cNvPr>
+              <p:cNvPicPr/>
+              <p:nvPr/>
+            </p:nvPicPr>
+            <p:blipFill>
+              <a:blip r:embed="rId11"/>
+              <a:stretch>
+                <a:fillRect/>
+              </a:stretch>
+            </p:blipFill>
+            <p:spPr>
+              <a:xfrm>
+                <a:off x="9971424" y="3068136"/>
+                <a:ext cx="266400" cy="167760"/>
+              </a:xfrm>
+              <a:prstGeom prst="rect">
+                <a:avLst/>
+              </a:prstGeom>
+            </p:spPr>
+          </p:pic>
+        </mc:Fallback>
+      </mc:AlternateContent>
+      <mc:AlternateContent xmlns:mc="http://schemas.openxmlformats.org/markup-compatibility/2006">
+        <mc:Choice xmlns:p14="http://schemas.microsoft.com/office/powerpoint/2010/main" Requires="p14">
+          <p:contentPart p14:bwMode="auto" r:id="rId12">
+            <p14:nvContentPartPr>
+              <p14:cNvPr id="10" name="Ink 9">
+                <a:extLst>
+                  <a:ext uri="{FF2B5EF4-FFF2-40B4-BE49-F238E27FC236}">
+                    <a16:creationId xmlns:a16="http://schemas.microsoft.com/office/drawing/2014/main" id="{23624204-1D39-41ED-0EFF-EF47C265E906}"/>
+                  </a:ext>
+                </a:extLst>
+              </p14:cNvPr>
+              <p14:cNvContentPartPr/>
+              <p14:nvPr/>
+            </p14:nvContentPartPr>
+            <p14:xfrm>
+              <a:off x="10436544" y="3418776"/>
+              <a:ext cx="227520" cy="109440"/>
+            </p14:xfrm>
+          </p:contentPart>
+        </mc:Choice>
+        <mc:Fallback>
+          <p:pic>
+            <p:nvPicPr>
+              <p:cNvPr id="10" name="Ink 9">
+                <a:extLst>
+                  <a:ext uri="{FF2B5EF4-FFF2-40B4-BE49-F238E27FC236}">
+                    <a16:creationId xmlns:a16="http://schemas.microsoft.com/office/drawing/2014/main" id="{23624204-1D39-41ED-0EFF-EF47C265E906}"/>
+                  </a:ext>
+                </a:extLst>
+              </p:cNvPr>
+              <p:cNvPicPr/>
+              <p:nvPr/>
+            </p:nvPicPr>
+            <p:blipFill>
+              <a:blip r:embed="rId13"/>
+              <a:stretch>
+                <a:fillRect/>
+              </a:stretch>
+            </p:blipFill>
+            <p:spPr>
+              <a:xfrm>
+                <a:off x="10418544" y="3400776"/>
+                <a:ext cx="263160" cy="145080"/>
+              </a:xfrm>
+              <a:prstGeom prst="rect">
+                <a:avLst/>
+              </a:prstGeom>
+            </p:spPr>
+          </p:pic>
+        </mc:Fallback>
+      </mc:AlternateContent>
     </p:spTree>
     <p:extLst>
       <p:ext uri="{BB962C8B-B14F-4D97-AF65-F5344CB8AC3E}">
@@ -5167,7 +5997,49 @@
         </p:nvSpPr>
         <p:spPr>
           <a:xfrm>
-            <a:off x="8083296" y="2194560"/>
+            <a:off x="7946910" y="2026501"/>
+            <a:ext cx="1673022" cy="369332"/>
+          </a:xfrm>
+          <a:prstGeom prst="rect">
+            <a:avLst/>
+          </a:prstGeom>
+          <a:noFill/>
+        </p:spPr>
+        <p:txBody>
+          <a:bodyPr wrap="none" rtlCol="0">
+            <a:spAutoFit/>
+          </a:bodyPr>
+          <a:lstStyle/>
+          <a:p>
+            <a:r>
+              <a:rPr lang="en-US" dirty="0">
+                <a:solidFill>
+                  <a:schemeClr val="accent6">
+                    <a:lumMod val="60000"/>
+                    <a:lumOff val="40000"/>
+                  </a:schemeClr>
+                </a:solidFill>
+              </a:rPr>
+              <a:t>Communication</a:t>
+            </a:r>
+          </a:p>
+        </p:txBody>
+      </p:sp>
+      <p:sp>
+        <p:nvSpPr>
+          <p:cNvPr id="3" name="TextBox 2">
+            <a:extLst>
+              <a:ext uri="{FF2B5EF4-FFF2-40B4-BE49-F238E27FC236}">
+                <a16:creationId xmlns:a16="http://schemas.microsoft.com/office/drawing/2014/main" id="{6A4B125F-F801-B80B-2AFD-3FA41D26A870}"/>
+              </a:ext>
+            </a:extLst>
+          </p:cNvPr>
+          <p:cNvSpPr txBox="1"/>
+          <p:nvPr/>
+        </p:nvSpPr>
+        <p:spPr>
+          <a:xfrm>
+            <a:off x="5053748" y="1552888"/>
             <a:ext cx="1673022" cy="369332"/>
           </a:xfrm>
           <a:prstGeom prst="rect">
